--- a/home_page_files/diffusion-swap.pptx
+++ b/home_page_files/diffusion-swap.pptx
@@ -5,13 +5,20 @@
     <p:sldMasterId id="2147483648" r:id="rId1"/>
   </p:sldMasterIdLst>
   <p:notesMasterIdLst>
-    <p:notesMasterId r:id="rId4"/>
+    <p:notesMasterId r:id="rId5"/>
   </p:notesMasterIdLst>
   <p:handoutMasterIdLst>
-    <p:handoutMasterId r:id="rId5"/>
+    <p:handoutMasterId r:id="rId12"/>
   </p:handoutMasterIdLst>
   <p:sldIdLst>
-    <p:sldId id="256" r:id="rId3"/>
+    <p:sldId id="265" r:id="rId3"/>
+    <p:sldId id="256" r:id="rId4"/>
+    <p:sldId id="260" r:id="rId6"/>
+    <p:sldId id="258" r:id="rId7"/>
+    <p:sldId id="261" r:id="rId8"/>
+    <p:sldId id="262" r:id="rId9"/>
+    <p:sldId id="263" r:id="rId10"/>
+    <p:sldId id="264" r:id="rId11"/>
   </p:sldIdLst>
   <p:sldSz cx="12192000" cy="6858000"/>
   <p:notesSz cx="7103745" cy="10234295"/>
@@ -701,19 +708,7 @@
   <p:cSld name="标题幻灯片">
     <p:bg>
       <p:bgPr>
-        <a:gradFill rotWithShape="1">
-          <a:gsLst>
-            <a:gs pos="0">
-              <a:schemeClr val="bg1"/>
-            </a:gs>
-            <a:gs pos="100000">
-              <a:schemeClr val="bg1">
-                <a:lumMod val="85000"/>
-              </a:schemeClr>
-            </a:gs>
-          </a:gsLst>
-          <a:lin ang="5400000" scaled="0"/>
-        </a:gradFill>
+        <a:noFill/>
         <a:effectLst/>
       </p:bgPr>
     </p:bg>
@@ -3540,6 +3535,66 @@
         <p:cNvGrpSpPr/>
         <p:nvPr/>
       </p:nvGrpSpPr>
+      <p:grpSpPr/>
+      <p:sp>
+        <p:nvSpPr>
+          <p:cNvPr id="2" name="标题 1"/>
+          <p:cNvSpPr>
+            <a:spLocks noGrp="1"/>
+          </p:cNvSpPr>
+          <p:nvPr>
+            <p:ph type="ctrTitle"/>
+          </p:nvPr>
+        </p:nvSpPr>
+        <p:spPr>
+          <a:xfrm>
+            <a:off x="1524000" y="3246377"/>
+            <a:ext cx="9144000" cy="2187001"/>
+          </a:xfrm>
+        </p:spPr>
+        <p:txBody>
+          <a:bodyPr>
+            <a:normAutofit fontScale="90000"/>
+          </a:bodyPr>
+          <a:p>
+            <a:r>
+              <a:rPr lang="zh-CN" altLang="en-US"/>
+              <a:t>Multimodal-driven Talking Face Generation via a</a:t>
+            </a:r>
+            <a:br>
+              <a:rPr lang="zh-CN" altLang="en-US"/>
+            </a:br>
+            <a:r>
+              <a:rPr lang="zh-CN" altLang="en-US"/>
+              <a:t>Unified Diffusion-based Generator</a:t>
+            </a:r>
+            <a:endParaRPr lang="zh-CN" altLang="en-US"/>
+          </a:p>
+        </p:txBody>
+      </p:sp>
+    </p:spTree>
+  </p:cSld>
+  <p:clrMapOvr>
+    <a:masterClrMapping/>
+  </p:clrMapOvr>
+</p:sld>
+</file>
+
+<file path=ppt/slides/slide2.xml><?xml version="1.0" encoding="utf-8"?>
+<p:sld xmlns:a="http://schemas.openxmlformats.org/drawingml/2006/main" xmlns:r="http://schemas.openxmlformats.org/officeDocument/2006/relationships" xmlns:p="http://schemas.openxmlformats.org/presentationml/2006/main">
+  <p:cSld>
+    <p:bg>
+      <p:bgPr>
+        <a:noFill/>
+        <a:effectLst/>
+      </p:bgPr>
+    </p:bg>
+    <p:spTree>
+      <p:nvGrpSpPr>
+        <p:cNvPr id="1" name=""/>
+        <p:cNvGrpSpPr/>
+        <p:nvPr/>
+      </p:nvGrpSpPr>
       <p:grpSpPr>
         <a:xfrm>
           <a:off x="0" y="0"/>
@@ -3548,6 +3603,369 @@
           <a:chExt cx="0" cy="0"/>
         </a:xfrm>
       </p:grpSpPr>
+      <p:pic>
+        <p:nvPicPr>
+          <p:cNvPr id="3" name="图片 2" descr="teaser"/>
+          <p:cNvPicPr>
+            <a:picLocks noChangeAspect="1"/>
+          </p:cNvPicPr>
+          <p:nvPr/>
+        </p:nvPicPr>
+        <p:blipFill>
+          <a:blip r:embed="rId1"/>
+          <a:stretch>
+            <a:fillRect/>
+          </a:stretch>
+        </p:blipFill>
+        <p:spPr>
+          <a:xfrm>
+            <a:off x="142875" y="0"/>
+            <a:ext cx="11906885" cy="6857365"/>
+          </a:xfrm>
+          <a:prstGeom prst="rect">
+            <a:avLst/>
+          </a:prstGeom>
+        </p:spPr>
+      </p:pic>
+    </p:spTree>
+  </p:cSld>
+  <p:clrMapOvr>
+    <a:masterClrMapping/>
+  </p:clrMapOvr>
+</p:sld>
+</file>
+
+<file path=ppt/slides/slide3.xml><?xml version="1.0" encoding="utf-8"?>
+<p:sld xmlns:a="http://schemas.openxmlformats.org/drawingml/2006/main" xmlns:r="http://schemas.openxmlformats.org/officeDocument/2006/relationships" xmlns:p="http://schemas.openxmlformats.org/presentationml/2006/main">
+  <p:cSld>
+    <p:spTree>
+      <p:nvGrpSpPr>
+        <p:cNvPr id="1" name=""/>
+        <p:cNvGrpSpPr/>
+        <p:nvPr/>
+      </p:nvGrpSpPr>
+      <p:grpSpPr/>
+      <p:pic>
+        <p:nvPicPr>
+          <p:cNvPr id="4" name="图片 3"/>
+          <p:cNvPicPr>
+            <a:picLocks noChangeAspect="1"/>
+          </p:cNvPicPr>
+          <p:nvPr/>
+        </p:nvPicPr>
+        <p:blipFill>
+          <a:blip r:embed="rId1"/>
+          <a:stretch>
+            <a:fillRect/>
+          </a:stretch>
+        </p:blipFill>
+        <p:spPr>
+          <a:xfrm>
+            <a:off x="1977390" y="635"/>
+            <a:ext cx="8230235" cy="6851650"/>
+          </a:xfrm>
+          <a:prstGeom prst="rect">
+            <a:avLst/>
+          </a:prstGeom>
+        </p:spPr>
+      </p:pic>
+    </p:spTree>
+  </p:cSld>
+  <p:clrMapOvr>
+    <a:masterClrMapping/>
+  </p:clrMapOvr>
+</p:sld>
+</file>
+
+<file path=ppt/slides/slide4.xml><?xml version="1.0" encoding="utf-8"?>
+<p:sld xmlns:a="http://schemas.openxmlformats.org/drawingml/2006/main" xmlns:r="http://schemas.openxmlformats.org/officeDocument/2006/relationships" xmlns:p="http://schemas.openxmlformats.org/presentationml/2006/main">
+  <p:cSld>
+    <p:spTree>
+      <p:nvGrpSpPr>
+        <p:cNvPr id="1" name=""/>
+        <p:cNvGrpSpPr/>
+        <p:nvPr/>
+      </p:nvGrpSpPr>
+      <p:grpSpPr/>
+      <p:pic>
+        <p:nvPicPr>
+          <p:cNvPr id="4" name="图片 3" descr="pipeline_swap"/>
+          <p:cNvPicPr>
+            <a:picLocks noChangeAspect="1"/>
+          </p:cNvPicPr>
+          <p:nvPr/>
+        </p:nvPicPr>
+        <p:blipFill>
+          <a:blip r:embed="rId1"/>
+          <a:stretch>
+            <a:fillRect/>
+          </a:stretch>
+        </p:blipFill>
+        <p:spPr>
+          <a:xfrm>
+            <a:off x="2328545" y="0"/>
+            <a:ext cx="7534910" cy="6846570"/>
+          </a:xfrm>
+          <a:prstGeom prst="rect">
+            <a:avLst/>
+          </a:prstGeom>
+        </p:spPr>
+      </p:pic>
+    </p:spTree>
+  </p:cSld>
+  <p:clrMapOvr>
+    <a:masterClrMapping/>
+  </p:clrMapOvr>
+</p:sld>
+</file>
+
+<file path=ppt/slides/slide5.xml><?xml version="1.0" encoding="utf-8"?>
+<p:sld xmlns:a="http://schemas.openxmlformats.org/drawingml/2006/main" xmlns:r="http://schemas.openxmlformats.org/officeDocument/2006/relationships" xmlns:p="http://schemas.openxmlformats.org/presentationml/2006/main">
+  <p:cSld>
+    <p:spTree>
+      <p:nvGrpSpPr>
+        <p:cNvPr id="1" name=""/>
+        <p:cNvGrpSpPr/>
+        <p:nvPr/>
+      </p:nvGrpSpPr>
+      <p:grpSpPr/>
+      <p:pic>
+        <p:nvPicPr>
+          <p:cNvPr id="4" name="图片 3" descr="swap_sota"/>
+          <p:cNvPicPr>
+            <a:picLocks noChangeAspect="1"/>
+          </p:cNvPicPr>
+          <p:nvPr/>
+        </p:nvPicPr>
+        <p:blipFill>
+          <a:blip r:embed="rId1"/>
+          <a:stretch>
+            <a:fillRect/>
+          </a:stretch>
+        </p:blipFill>
+        <p:spPr>
+          <a:xfrm>
+            <a:off x="0" y="302895"/>
+            <a:ext cx="12192000" cy="6252210"/>
+          </a:xfrm>
+          <a:prstGeom prst="rect">
+            <a:avLst/>
+          </a:prstGeom>
+        </p:spPr>
+      </p:pic>
+    </p:spTree>
+  </p:cSld>
+  <p:clrMapOvr>
+    <a:masterClrMapping/>
+  </p:clrMapOvr>
+</p:sld>
+</file>
+
+<file path=ppt/slides/slide6.xml><?xml version="1.0" encoding="utf-8"?>
+<p:sld xmlns:a="http://schemas.openxmlformats.org/drawingml/2006/main" xmlns:r="http://schemas.openxmlformats.org/officeDocument/2006/relationships" xmlns:p="http://schemas.openxmlformats.org/presentationml/2006/main">
+  <p:cSld>
+    <p:spTree>
+      <p:nvGrpSpPr>
+        <p:cNvPr id="1" name=""/>
+        <p:cNvGrpSpPr/>
+        <p:nvPr/>
+      </p:nvGrpSpPr>
+      <p:grpSpPr/>
+      <p:pic>
+        <p:nvPicPr>
+          <p:cNvPr id="4" name="图片 3" descr="show2"/>
+          <p:cNvPicPr>
+            <a:picLocks noChangeAspect="1"/>
+          </p:cNvPicPr>
+          <p:nvPr/>
+        </p:nvPicPr>
+        <p:blipFill>
+          <a:blip r:embed="rId1"/>
+          <a:srcRect r="33417"/>
+          <a:stretch>
+            <a:fillRect/>
+          </a:stretch>
+        </p:blipFill>
+        <p:spPr>
+          <a:xfrm>
+            <a:off x="0" y="407670"/>
+            <a:ext cx="12187555" cy="3183255"/>
+          </a:xfrm>
+          <a:prstGeom prst="rect">
+            <a:avLst/>
+          </a:prstGeom>
+        </p:spPr>
+      </p:pic>
+      <p:sp>
+        <p:nvSpPr>
+          <p:cNvPr id="5" name="文本框 4"/>
+          <p:cNvSpPr txBox="1"/>
+          <p:nvPr/>
+        </p:nvSpPr>
+        <p:spPr>
+          <a:xfrm>
+            <a:off x="6174740" y="4250690"/>
+            <a:ext cx="5239385" cy="1568450"/>
+          </a:xfrm>
+          <a:prstGeom prst="rect">
+            <a:avLst/>
+          </a:prstGeom>
+          <a:noFill/>
+        </p:spPr>
+        <p:txBody>
+          <a:bodyPr wrap="square" rtlCol="0">
+            <a:spAutoFit/>
+          </a:bodyPr>
+          <a:p>
+            <a:r>
+              <a:rPr lang="en-US" altLang="zh-CN" sz="3200"/>
+              <a:t>Our method can handle face shape changes, while remains high quality. </a:t>
+            </a:r>
+            <a:endParaRPr lang="en-US" altLang="zh-CN" sz="3200"/>
+          </a:p>
+        </p:txBody>
+      </p:sp>
+      <p:pic>
+        <p:nvPicPr>
+          <p:cNvPr id="6" name="图片 5"/>
+          <p:cNvPicPr>
+            <a:picLocks noChangeAspect="1"/>
+          </p:cNvPicPr>
+          <p:nvPr/>
+        </p:nvPicPr>
+        <p:blipFill>
+          <a:blip r:embed="rId2"/>
+          <a:stretch>
+            <a:fillRect/>
+          </a:stretch>
+        </p:blipFill>
+        <p:spPr>
+          <a:xfrm>
+            <a:off x="1014095" y="4250690"/>
+            <a:ext cx="4394200" cy="1828800"/>
+          </a:xfrm>
+          <a:prstGeom prst="rect">
+            <a:avLst/>
+          </a:prstGeom>
+        </p:spPr>
+      </p:pic>
+    </p:spTree>
+  </p:cSld>
+  <p:clrMapOvr>
+    <a:masterClrMapping/>
+  </p:clrMapOvr>
+</p:sld>
+</file>
+
+<file path=ppt/slides/slide7.xml><?xml version="1.0" encoding="utf-8"?>
+<p:sld xmlns:a="http://schemas.openxmlformats.org/drawingml/2006/main" xmlns:r="http://schemas.openxmlformats.org/officeDocument/2006/relationships" xmlns:p="http://schemas.openxmlformats.org/presentationml/2006/main">
+  <p:cSld>
+    <p:spTree>
+      <p:nvGrpSpPr>
+        <p:cNvPr id="1" name=""/>
+        <p:cNvGrpSpPr/>
+        <p:nvPr/>
+      </p:nvGrpSpPr>
+      <p:grpSpPr/>
+      <p:pic>
+        <p:nvPicPr>
+          <p:cNvPr id="4" name="图片 3" descr="swap_abla"/>
+          <p:cNvPicPr>
+            <a:picLocks noChangeAspect="1"/>
+          </p:cNvPicPr>
+          <p:nvPr/>
+        </p:nvPicPr>
+        <p:blipFill>
+          <a:blip r:embed="rId1"/>
+          <a:stretch>
+            <a:fillRect/>
+          </a:stretch>
+        </p:blipFill>
+        <p:spPr>
+          <a:xfrm>
+            <a:off x="1287780" y="0"/>
+            <a:ext cx="7718425" cy="5337175"/>
+          </a:xfrm>
+          <a:prstGeom prst="rect">
+            <a:avLst/>
+          </a:prstGeom>
+        </p:spPr>
+      </p:pic>
+      <p:pic>
+        <p:nvPicPr>
+          <p:cNvPr id="5" name="图片 4"/>
+          <p:cNvPicPr>
+            <a:picLocks noChangeAspect="1"/>
+          </p:cNvPicPr>
+          <p:nvPr/>
+        </p:nvPicPr>
+        <p:blipFill>
+          <a:blip r:embed="rId2"/>
+          <a:stretch>
+            <a:fillRect/>
+          </a:stretch>
+        </p:blipFill>
+        <p:spPr>
+          <a:xfrm>
+            <a:off x="3140075" y="5588000"/>
+            <a:ext cx="4013200" cy="1270000"/>
+          </a:xfrm>
+          <a:prstGeom prst="rect">
+            <a:avLst/>
+          </a:prstGeom>
+        </p:spPr>
+      </p:pic>
+      <p:sp>
+        <p:nvSpPr>
+          <p:cNvPr id="6" name="文本框 5"/>
+          <p:cNvSpPr txBox="1"/>
+          <p:nvPr/>
+        </p:nvSpPr>
+        <p:spPr>
+          <a:xfrm>
+            <a:off x="8496300" y="5588000"/>
+            <a:ext cx="2646045" cy="1076325"/>
+          </a:xfrm>
+          <a:prstGeom prst="rect">
+            <a:avLst/>
+          </a:prstGeom>
+          <a:noFill/>
+        </p:spPr>
+        <p:txBody>
+          <a:bodyPr wrap="square" rtlCol="0">
+            <a:spAutoFit/>
+          </a:bodyPr>
+          <a:p>
+            <a:r>
+              <a:rPr lang="en-US" altLang="zh-CN" sz="3200"/>
+              <a:t>Small Mask is the </a:t>
+            </a:r>
+            <a:r>
+              <a:rPr lang="en-US" altLang="zh-CN" sz="3200"/>
+              <a:t>best</a:t>
+            </a:r>
+            <a:endParaRPr lang="en-US" altLang="zh-CN" sz="3200"/>
+          </a:p>
+        </p:txBody>
+      </p:sp>
+    </p:spTree>
+  </p:cSld>
+  <p:clrMapOvr>
+    <a:masterClrMapping/>
+  </p:clrMapOvr>
+</p:sld>
+</file>
+
+<file path=ppt/slides/slide8.xml><?xml version="1.0" encoding="utf-8"?>
+<p:sld xmlns:a="http://schemas.openxmlformats.org/drawingml/2006/main" xmlns:r="http://schemas.openxmlformats.org/officeDocument/2006/relationships" xmlns:p="http://schemas.openxmlformats.org/presentationml/2006/main">
+  <p:cSld>
+    <p:spTree>
+      <p:nvGrpSpPr>
+        <p:cNvPr id="1" name=""/>
+        <p:cNvGrpSpPr/>
+        <p:nvPr/>
+      </p:nvGrpSpPr>
+      <p:grpSpPr/>
       <p:sp>
         <p:nvSpPr>
           <p:cNvPr id="2" name="标题 1"/>
@@ -3558,35 +3976,89 @@
             <p:ph type="ctrTitle"/>
           </p:nvPr>
         </p:nvSpPr>
-        <p:spPr/>
+        <p:spPr>
+          <a:xfrm>
+            <a:off x="1524000" y="257"/>
+            <a:ext cx="9144000" cy="2187001"/>
+          </a:xfrm>
+        </p:spPr>
         <p:txBody>
           <a:bodyPr/>
-          <a:lstStyle/>
-          <a:p>
-            <a:endParaRPr lang="zh-CN" altLang="en-US" dirty="0">
-              <a:effectLst/>
-            </a:endParaRPr>
-          </a:p>
-        </p:txBody>
-      </p:sp>
-      <p:sp>
-        <p:nvSpPr>
-          <p:cNvPr id="5" name="副标题 4"/>
-          <p:cNvSpPr>
-            <a:spLocks noGrp="1"/>
-          </p:cNvSpPr>
-          <p:nvPr>
-            <p:ph type="subTitle" idx="1"/>
-          </p:nvPr>
-        </p:nvSpPr>
-        <p:spPr/>
-        <p:txBody>
-          <a:bodyPr/>
-          <a:lstStyle/>
-          <a:p>
-            <a:endParaRPr lang="zh-CN" altLang="en-US" dirty="0">
-              <a:latin typeface="+mn-lt"/>
-            </a:endParaRPr>
+          <a:p>
+            <a:r>
+              <a:rPr lang="en-US" altLang="zh-CN"/>
+              <a:t>Limitations</a:t>
+            </a:r>
+            <a:endParaRPr lang="en-US" altLang="zh-CN"/>
+          </a:p>
+        </p:txBody>
+      </p:sp>
+      <p:sp>
+        <p:nvSpPr>
+          <p:cNvPr id="4" name="文本框 3"/>
+          <p:cNvSpPr txBox="1"/>
+          <p:nvPr/>
+        </p:nvSpPr>
+        <p:spPr>
+          <a:xfrm>
+            <a:off x="1157605" y="2854325"/>
+            <a:ext cx="9876790" cy="1753235"/>
+          </a:xfrm>
+          <a:prstGeom prst="rect">
+            <a:avLst/>
+          </a:prstGeom>
+          <a:noFill/>
+        </p:spPr>
+        <p:txBody>
+          <a:bodyPr wrap="square" rtlCol="0" anchor="t">
+            <a:spAutoFit/>
+          </a:bodyPr>
+          <a:p>
+            <a:r>
+              <a:rPr lang="en-US" altLang="zh-CN"/>
+              <a:t>O</a:t>
+            </a:r>
+            <a:r>
+              <a:rPr lang="zh-CN" altLang="en-US"/>
+              <a:t>ur method retains some disadvantages of the diffusion model. For example, it takes about 30 seconds to generate</a:t>
+            </a:r>
+            <a:r>
+              <a:rPr lang="en-US" altLang="zh-CN"/>
+              <a:t> </a:t>
+            </a:r>
+            <a:r>
+              <a:rPr lang="zh-CN" altLang="en-US"/>
+              <a:t>a single face under the T = 1000 DDPM setting, which is</a:t>
+            </a:r>
+            <a:r>
+              <a:rPr lang="en-US" altLang="zh-CN"/>
+              <a:t> </a:t>
+            </a:r>
+            <a:r>
+              <a:rPr lang="zh-CN" altLang="en-US"/>
+              <a:t>unacceptable in the real application. We also do not train the model</a:t>
+            </a:r>
+            <a:r>
+              <a:rPr lang="en-US" altLang="zh-CN"/>
+              <a:t> </a:t>
+            </a:r>
+            <a:r>
+              <a:rPr lang="zh-CN" altLang="en-US"/>
+              <a:t>for a longer time, considering the high consumption of diffusion</a:t>
+            </a:r>
+            <a:r>
+              <a:rPr lang="en-US" altLang="zh-CN"/>
+              <a:t> </a:t>
+            </a:r>
+            <a:r>
+              <a:rPr lang="zh-CN" altLang="en-US"/>
+              <a:t>model. For efficiency, our model only support 256 × 256 image</a:t>
+            </a:r>
+            <a:r>
+              <a:rPr lang="en-US" altLang="zh-CN"/>
+              <a:t> generation. Although DDIM and LDMs have alleviated the above problems, we hope to propose an intuitive design like StyleGAN to allow efficient high-resolution face generation</a:t>
+            </a:r>
+            <a:endParaRPr lang="en-US" altLang="zh-CN"/>
           </a:p>
         </p:txBody>
       </p:sp>

--- a/home_page_files/diffusion-swap.pptx
+++ b/home_page_files/diffusion-swap.pptx
@@ -3945,6 +3945,177 @@
               <a:t>best</a:t>
             </a:r>
             <a:endParaRPr lang="en-US" altLang="zh-CN" sz="3200"/>
+          </a:p>
+        </p:txBody>
+      </p:sp>
+      <p:pic>
+        <p:nvPicPr>
+          <p:cNvPr id="2" name="图片 1" descr="small"/>
+          <p:cNvPicPr>
+            <a:picLocks noChangeAspect="1"/>
+          </p:cNvPicPr>
+          <p:nvPr/>
+        </p:nvPicPr>
+        <p:blipFill>
+          <a:blip r:embed="rId3"/>
+          <a:stretch>
+            <a:fillRect/>
+          </a:stretch>
+        </p:blipFill>
+        <p:spPr>
+          <a:xfrm>
+            <a:off x="9759950" y="181610"/>
+            <a:ext cx="1440000" cy="1440000"/>
+          </a:xfrm>
+          <a:prstGeom prst="rect">
+            <a:avLst/>
+          </a:prstGeom>
+        </p:spPr>
+      </p:pic>
+      <p:pic>
+        <p:nvPicPr>
+          <p:cNvPr id="3" name="图片 2" descr="normal"/>
+          <p:cNvPicPr>
+            <a:picLocks noChangeAspect="1"/>
+          </p:cNvPicPr>
+          <p:nvPr/>
+        </p:nvPicPr>
+        <p:blipFill>
+          <a:blip r:embed="rId4"/>
+          <a:stretch>
+            <a:fillRect/>
+          </a:stretch>
+        </p:blipFill>
+        <p:spPr>
+          <a:xfrm>
+            <a:off x="9759950" y="1948815"/>
+            <a:ext cx="1440000" cy="1440000"/>
+          </a:xfrm>
+          <a:prstGeom prst="rect">
+            <a:avLst/>
+          </a:prstGeom>
+        </p:spPr>
+      </p:pic>
+      <p:pic>
+        <p:nvPicPr>
+          <p:cNvPr id="7" name="图片 6" descr="dilate"/>
+          <p:cNvPicPr>
+            <a:picLocks noChangeAspect="1"/>
+          </p:cNvPicPr>
+          <p:nvPr/>
+        </p:nvPicPr>
+        <p:blipFill>
+          <a:blip r:embed="rId5"/>
+          <a:stretch>
+            <a:fillRect/>
+          </a:stretch>
+        </p:blipFill>
+        <p:spPr>
+          <a:xfrm>
+            <a:off x="9759950" y="3716020"/>
+            <a:ext cx="1440000" cy="1440000"/>
+          </a:xfrm>
+          <a:prstGeom prst="rect">
+            <a:avLst/>
+          </a:prstGeom>
+        </p:spPr>
+      </p:pic>
+      <p:sp>
+        <p:nvSpPr>
+          <p:cNvPr id="8" name="文本框 7"/>
+          <p:cNvSpPr txBox="1"/>
+          <p:nvPr/>
+        </p:nvSpPr>
+        <p:spPr>
+          <a:xfrm>
+            <a:off x="9839960" y="1580515"/>
+            <a:ext cx="1360170" cy="368300"/>
+          </a:xfrm>
+          <a:prstGeom prst="rect">
+            <a:avLst/>
+          </a:prstGeom>
+          <a:noFill/>
+        </p:spPr>
+        <p:txBody>
+          <a:bodyPr wrap="square" rtlCol="0">
+            <a:spAutoFit/>
+          </a:bodyPr>
+          <a:p>
+            <a:r>
+              <a:rPr lang="en-US" altLang="zh-CN"/>
+              <a:t>small </a:t>
+            </a:r>
+            <a:r>
+              <a:rPr lang="en-US" altLang="zh-CN"/>
+              <a:t>mask</a:t>
+            </a:r>
+            <a:endParaRPr lang="en-US" altLang="zh-CN"/>
+          </a:p>
+        </p:txBody>
+      </p:sp>
+      <p:sp>
+        <p:nvSpPr>
+          <p:cNvPr id="9" name="文本框 8"/>
+          <p:cNvSpPr txBox="1"/>
+          <p:nvPr/>
+        </p:nvSpPr>
+        <p:spPr>
+          <a:xfrm>
+            <a:off x="9758045" y="3347720"/>
+            <a:ext cx="1524000" cy="368300"/>
+          </a:xfrm>
+          <a:prstGeom prst="rect">
+            <a:avLst/>
+          </a:prstGeom>
+          <a:noFill/>
+        </p:spPr>
+        <p:txBody>
+          <a:bodyPr wrap="square" rtlCol="0">
+            <a:spAutoFit/>
+          </a:bodyPr>
+          <a:p>
+            <a:r>
+              <a:rPr lang="en-US" altLang="zh-CN"/>
+              <a:t>normal </a:t>
+            </a:r>
+            <a:r>
+              <a:rPr lang="en-US" altLang="zh-CN"/>
+              <a:t>mask</a:t>
+            </a:r>
+            <a:endParaRPr lang="en-US" altLang="zh-CN"/>
+          </a:p>
+        </p:txBody>
+      </p:sp>
+      <p:sp>
+        <p:nvSpPr>
+          <p:cNvPr id="10" name="文本框 9"/>
+          <p:cNvSpPr txBox="1"/>
+          <p:nvPr/>
+        </p:nvSpPr>
+        <p:spPr>
+          <a:xfrm>
+            <a:off x="9718040" y="5126990"/>
+            <a:ext cx="1524000" cy="368300"/>
+          </a:xfrm>
+          <a:prstGeom prst="rect">
+            <a:avLst/>
+          </a:prstGeom>
+          <a:noFill/>
+        </p:spPr>
+        <p:txBody>
+          <a:bodyPr wrap="square" rtlCol="0">
+            <a:spAutoFit/>
+          </a:bodyPr>
+          <a:p>
+            <a:r>
+              <a:rPr lang="en-US" altLang="zh-CN"/>
+              <a:t>dilated </a:t>
+            </a:r>
+            <a:r>
+              <a:rPr lang="en-US" altLang="zh-CN"/>
+              <a:t>mask</a:t>
+            </a:r>
+            <a:endParaRPr lang="en-US" altLang="zh-CN"/>
           </a:p>
         </p:txBody>
       </p:sp>
